--- a/assets/powerpoints/module-meteo/A3-le-vocabulaire-de-l-hiver.pptx
+++ b/assets/powerpoints/module-meteo/A3-le-vocabulaire-de-l-hiver.pptx
@@ -4720,7 +4720,7 @@
                 </a:solidFill>
                 <a:latin typeface="Verdana"/>
               </a:rPr>
-              <a:t>SÉANCE A3  ·  MODULE 6</a:t>
+              <a:t>SÉANCE A3  ·  MODULE 7</a:t>
             </a:r>
           </a:p>
         </p:txBody>

--- a/assets/powerpoints/module-meteo/A3-le-vocabulaire-de-l-hiver.pptx
+++ b/assets/powerpoints/module-meteo/A3-le-vocabulaire-de-l-hiver.pptx
@@ -4716,7 +4716,7 @@
             <a:r>
               <a:rPr sz="1300" b="1" i="0" spc="156">
                 <a:solidFill>
-                  <a:srgbClr val="166534"/>
+                  <a:srgbClr val="A5335F"/>
                 </a:solidFill>
                 <a:latin typeface="Verdana"/>
               </a:rPr>
@@ -5056,7 +5056,7 @@
             <a:r>
               <a:rPr sz="1300" b="1" i="0" spc="156">
                 <a:solidFill>
-                  <a:srgbClr val="166534"/>
+                  <a:srgbClr val="A5335F"/>
                 </a:solidFill>
                 <a:latin typeface="Verdana"/>
               </a:rPr>
@@ -5206,7 +5206,7 @@
             </a:avLst>
           </a:prstGeom>
           <a:solidFill>
-            <a:srgbClr val="E3F1E7"/>
+            <a:srgbClr val="FCE9F0"/>
           </a:solidFill>
           <a:ln>
             <a:noFill/>
@@ -5263,7 +5263,7 @@
             <a:r>
               <a:rPr sz="1500" b="1" i="0">
                 <a:solidFill>
-                  <a:srgbClr val="166534"/>
+                  <a:srgbClr val="A5335F"/>
                 </a:solidFill>
                 <a:latin typeface="Verdana"/>
               </a:rPr>
@@ -5383,7 +5383,7 @@
             </a:avLst>
           </a:prstGeom>
           <a:solidFill>
-            <a:srgbClr val="E3F1E7"/>
+            <a:srgbClr val="FCE9F0"/>
           </a:solidFill>
           <a:ln>
             <a:noFill/>
@@ -5440,7 +5440,7 @@
             <a:r>
               <a:rPr sz="1500" b="1" i="0">
                 <a:solidFill>
-                  <a:srgbClr val="166534"/>
+                  <a:srgbClr val="A5335F"/>
                 </a:solidFill>
                 <a:latin typeface="Verdana"/>
               </a:rPr>
@@ -5560,7 +5560,7 @@
             </a:avLst>
           </a:prstGeom>
           <a:solidFill>
-            <a:srgbClr val="E3F1E7"/>
+            <a:srgbClr val="FCE9F0"/>
           </a:solidFill>
           <a:ln>
             <a:noFill/>
@@ -5617,7 +5617,7 @@
             <a:r>
               <a:rPr sz="1500" b="1" i="0">
                 <a:solidFill>
-                  <a:srgbClr val="166534"/>
+                  <a:srgbClr val="A5335F"/>
                 </a:solidFill>
                 <a:latin typeface="Verdana"/>
               </a:rPr>
@@ -5737,7 +5737,7 @@
             </a:avLst>
           </a:prstGeom>
           <a:solidFill>
-            <a:srgbClr val="E3F1E7"/>
+            <a:srgbClr val="FCE9F0"/>
           </a:solidFill>
           <a:ln>
             <a:noFill/>
@@ -5794,7 +5794,7 @@
             <a:r>
               <a:rPr sz="1500" b="1" i="0">
                 <a:solidFill>
-                  <a:srgbClr val="166534"/>
+                  <a:srgbClr val="A5335F"/>
                 </a:solidFill>
                 <a:latin typeface="Verdana"/>
               </a:rPr>
@@ -5914,7 +5914,7 @@
             </a:avLst>
           </a:prstGeom>
           <a:solidFill>
-            <a:srgbClr val="E3F1E7"/>
+            <a:srgbClr val="FCE9F0"/>
           </a:solidFill>
           <a:ln>
             <a:noFill/>
@@ -5971,7 +5971,7 @@
             <a:r>
               <a:rPr sz="1500" b="1" i="0">
                 <a:solidFill>
-                  <a:srgbClr val="166534"/>
+                  <a:srgbClr val="A5335F"/>
                 </a:solidFill>
                 <a:latin typeface="Verdana"/>
               </a:rPr>
@@ -6196,7 +6196,7 @@
             <a:r>
               <a:rPr sz="1300" b="1" i="0" spc="156">
                 <a:solidFill>
-                  <a:srgbClr val="166534"/>
+                  <a:srgbClr val="A5335F"/>
                 </a:solidFill>
                 <a:latin typeface="Verdana"/>
               </a:rPr>
@@ -6745,7 +6745,7 @@
             <a:r>
               <a:rPr sz="1300" b="1" i="0" spc="156">
                 <a:solidFill>
-                  <a:srgbClr val="166534"/>
+                  <a:srgbClr val="A5335F"/>
                 </a:solidFill>
                 <a:latin typeface="Verdana"/>
               </a:rPr>
@@ -7294,7 +7294,7 @@
             <a:r>
               <a:rPr sz="1300" b="1" i="0" spc="156">
                 <a:solidFill>
-                  <a:srgbClr val="166534"/>
+                  <a:srgbClr val="A5335F"/>
                 </a:solidFill>
                 <a:latin typeface="Verdana"/>
               </a:rPr>
@@ -7444,7 +7444,7 @@
             </a:avLst>
           </a:prstGeom>
           <a:solidFill>
-            <a:srgbClr val="E3F1E7"/>
+            <a:srgbClr val="FCE9F0"/>
           </a:solidFill>
           <a:ln>
             <a:noFill/>
@@ -7501,7 +7501,7 @@
             <a:r>
               <a:rPr sz="1500" b="1" i="0">
                 <a:solidFill>
-                  <a:srgbClr val="166534"/>
+                  <a:srgbClr val="A5335F"/>
                 </a:solidFill>
                 <a:latin typeface="Verdana"/>
               </a:rPr>
@@ -7612,7 +7612,7 @@
             </a:avLst>
           </a:prstGeom>
           <a:solidFill>
-            <a:srgbClr val="E3F1E7"/>
+            <a:srgbClr val="FCE9F0"/>
           </a:solidFill>
           <a:ln>
             <a:noFill/>
@@ -7669,7 +7669,7 @@
             <a:r>
               <a:rPr sz="1500" b="1" i="0">
                 <a:solidFill>
-                  <a:srgbClr val="166534"/>
+                  <a:srgbClr val="A5335F"/>
                 </a:solidFill>
                 <a:latin typeface="Verdana"/>
               </a:rPr>
@@ -7780,7 +7780,7 @@
             </a:avLst>
           </a:prstGeom>
           <a:solidFill>
-            <a:srgbClr val="E3F1E7"/>
+            <a:srgbClr val="FCE9F0"/>
           </a:solidFill>
           <a:ln>
             <a:noFill/>
@@ -7837,7 +7837,7 @@
             <a:r>
               <a:rPr sz="1500" b="1" i="0">
                 <a:solidFill>
-                  <a:srgbClr val="166534"/>
+                  <a:srgbClr val="A5335F"/>
                 </a:solidFill>
                 <a:latin typeface="Verdana"/>
               </a:rPr>
@@ -7948,7 +7948,7 @@
             </a:avLst>
           </a:prstGeom>
           <a:solidFill>
-            <a:srgbClr val="E3F1E7"/>
+            <a:srgbClr val="FCE9F0"/>
           </a:solidFill>
           <a:ln>
             <a:noFill/>
@@ -8005,7 +8005,7 @@
             <a:r>
               <a:rPr sz="1500" b="1" i="0">
                 <a:solidFill>
-                  <a:srgbClr val="166534"/>
+                  <a:srgbClr val="A5335F"/>
                 </a:solidFill>
                 <a:latin typeface="Verdana"/>
               </a:rPr>
@@ -8116,7 +8116,7 @@
             </a:avLst>
           </a:prstGeom>
           <a:solidFill>
-            <a:srgbClr val="E3F1E7"/>
+            <a:srgbClr val="FCE9F0"/>
           </a:solidFill>
           <a:ln>
             <a:noFill/>
@@ -8173,7 +8173,7 @@
             <a:r>
               <a:rPr sz="1500" b="1" i="0">
                 <a:solidFill>
-                  <a:srgbClr val="166534"/>
+                  <a:srgbClr val="A5335F"/>
                 </a:solidFill>
                 <a:latin typeface="Verdana"/>
               </a:rPr>
@@ -8389,7 +8389,7 @@
             <a:r>
               <a:rPr sz="1300" b="1" i="0" spc="156">
                 <a:solidFill>
-                  <a:srgbClr val="166534"/>
+                  <a:srgbClr val="A5335F"/>
                 </a:solidFill>
                 <a:latin typeface="Verdana"/>
               </a:rPr>
@@ -8539,7 +8539,7 @@
             </a:avLst>
           </a:prstGeom>
           <a:solidFill>
-            <a:srgbClr val="E3F1E7"/>
+            <a:srgbClr val="FCE9F0"/>
           </a:solidFill>
           <a:ln>
             <a:noFill/>
@@ -8596,7 +8596,7 @@
             <a:r>
               <a:rPr sz="1500" b="1" i="0">
                 <a:solidFill>
-                  <a:srgbClr val="166534"/>
+                  <a:srgbClr val="A5335F"/>
                 </a:solidFill>
                 <a:latin typeface="Verdana"/>
               </a:rPr>
@@ -8716,7 +8716,7 @@
             </a:avLst>
           </a:prstGeom>
           <a:solidFill>
-            <a:srgbClr val="E3F1E7"/>
+            <a:srgbClr val="FCE9F0"/>
           </a:solidFill>
           <a:ln>
             <a:noFill/>
@@ -8773,7 +8773,7 @@
             <a:r>
               <a:rPr sz="1500" b="1" i="0">
                 <a:solidFill>
-                  <a:srgbClr val="166534"/>
+                  <a:srgbClr val="A5335F"/>
                 </a:solidFill>
                 <a:latin typeface="Verdana"/>
               </a:rPr>
@@ -8893,7 +8893,7 @@
             </a:avLst>
           </a:prstGeom>
           <a:solidFill>
-            <a:srgbClr val="E3F1E7"/>
+            <a:srgbClr val="FCE9F0"/>
           </a:solidFill>
           <a:ln>
             <a:noFill/>
@@ -8950,7 +8950,7 @@
             <a:r>
               <a:rPr sz="1500" b="1" i="0">
                 <a:solidFill>
-                  <a:srgbClr val="166534"/>
+                  <a:srgbClr val="A5335F"/>
                 </a:solidFill>
                 <a:latin typeface="Verdana"/>
               </a:rPr>
@@ -9070,7 +9070,7 @@
             </a:avLst>
           </a:prstGeom>
           <a:solidFill>
-            <a:srgbClr val="E3F1E7"/>
+            <a:srgbClr val="FCE9F0"/>
           </a:solidFill>
           <a:ln>
             <a:noFill/>
@@ -9127,7 +9127,7 @@
             <a:r>
               <a:rPr sz="1500" b="1" i="0">
                 <a:solidFill>
-                  <a:srgbClr val="166534"/>
+                  <a:srgbClr val="A5335F"/>
                 </a:solidFill>
                 <a:latin typeface="Verdana"/>
               </a:rPr>
@@ -9247,7 +9247,7 @@
             </a:avLst>
           </a:prstGeom>
           <a:solidFill>
-            <a:srgbClr val="E3F1E7"/>
+            <a:srgbClr val="FCE9F0"/>
           </a:solidFill>
           <a:ln>
             <a:noFill/>
@@ -9304,7 +9304,7 @@
             <a:r>
               <a:rPr sz="1500" b="1" i="0">
                 <a:solidFill>
-                  <a:srgbClr val="166534"/>
+                  <a:srgbClr val="A5335F"/>
                 </a:solidFill>
                 <a:latin typeface="Verdana"/>
               </a:rPr>
@@ -9529,7 +9529,7 @@
             <a:r>
               <a:rPr sz="1300" b="1" i="0" spc="156">
                 <a:solidFill>
-                  <a:srgbClr val="166534"/>
+                  <a:srgbClr val="A5335F"/>
                 </a:solidFill>
                 <a:latin typeface="Verdana"/>
               </a:rPr>
@@ -9679,7 +9679,7 @@
             </a:avLst>
           </a:prstGeom>
           <a:solidFill>
-            <a:srgbClr val="E3F1E7"/>
+            <a:srgbClr val="FCE9F0"/>
           </a:solidFill>
           <a:ln>
             <a:noFill/>
@@ -9736,7 +9736,7 @@
             <a:r>
               <a:rPr sz="1500" b="1" i="0">
                 <a:solidFill>
-                  <a:srgbClr val="166534"/>
+                  <a:srgbClr val="A5335F"/>
                 </a:solidFill>
                 <a:latin typeface="Verdana"/>
               </a:rPr>
@@ -9847,7 +9847,7 @@
             </a:avLst>
           </a:prstGeom>
           <a:solidFill>
-            <a:srgbClr val="E3F1E7"/>
+            <a:srgbClr val="FCE9F0"/>
           </a:solidFill>
           <a:ln>
             <a:noFill/>
@@ -9904,7 +9904,7 @@
             <a:r>
               <a:rPr sz="1500" b="1" i="0">
                 <a:solidFill>
-                  <a:srgbClr val="166534"/>
+                  <a:srgbClr val="A5335F"/>
                 </a:solidFill>
                 <a:latin typeface="Verdana"/>
               </a:rPr>
@@ -10015,7 +10015,7 @@
             </a:avLst>
           </a:prstGeom>
           <a:solidFill>
-            <a:srgbClr val="E3F1E7"/>
+            <a:srgbClr val="FCE9F0"/>
           </a:solidFill>
           <a:ln>
             <a:noFill/>
@@ -10072,7 +10072,7 @@
             <a:r>
               <a:rPr sz="1500" b="1" i="0">
                 <a:solidFill>
-                  <a:srgbClr val="166534"/>
+                  <a:srgbClr val="A5335F"/>
                 </a:solidFill>
                 <a:latin typeface="Verdana"/>
               </a:rPr>
@@ -10288,7 +10288,7 @@
             <a:r>
               <a:rPr sz="1300" b="1" i="0" spc="156">
                 <a:solidFill>
-                  <a:srgbClr val="166534"/>
+                  <a:srgbClr val="A5335F"/>
                 </a:solidFill>
                 <a:latin typeface="Verdana"/>
               </a:rPr>
@@ -10438,7 +10438,7 @@
             </a:avLst>
           </a:prstGeom>
           <a:solidFill>
-            <a:srgbClr val="E3F1E7"/>
+            <a:srgbClr val="FCE9F0"/>
           </a:solidFill>
           <a:ln>
             <a:noFill/>
@@ -10495,7 +10495,7 @@
             <a:r>
               <a:rPr sz="1500" b="1" i="0">
                 <a:solidFill>
-                  <a:srgbClr val="166534"/>
+                  <a:srgbClr val="A5335F"/>
                 </a:solidFill>
                 <a:latin typeface="Verdana"/>
               </a:rPr>
@@ -10615,7 +10615,7 @@
             </a:avLst>
           </a:prstGeom>
           <a:solidFill>
-            <a:srgbClr val="E3F1E7"/>
+            <a:srgbClr val="FCE9F0"/>
           </a:solidFill>
           <a:ln>
             <a:noFill/>
@@ -10672,7 +10672,7 @@
             <a:r>
               <a:rPr sz="1500" b="1" i="0">
                 <a:solidFill>
-                  <a:srgbClr val="166534"/>
+                  <a:srgbClr val="A5335F"/>
                 </a:solidFill>
                 <a:latin typeface="Verdana"/>
               </a:rPr>
@@ -10792,7 +10792,7 @@
             </a:avLst>
           </a:prstGeom>
           <a:solidFill>
-            <a:srgbClr val="E3F1E7"/>
+            <a:srgbClr val="FCE9F0"/>
           </a:solidFill>
           <a:ln>
             <a:noFill/>
@@ -10849,7 +10849,7 @@
             <a:r>
               <a:rPr sz="1500" b="1" i="0">
                 <a:solidFill>
-                  <a:srgbClr val="166534"/>
+                  <a:srgbClr val="A5335F"/>
                 </a:solidFill>
                 <a:latin typeface="Verdana"/>
               </a:rPr>
@@ -11537,7 +11537,7 @@
             <a:r>
               <a:rPr sz="1300" b="1" i="0" spc="156">
                 <a:solidFill>
-                  <a:srgbClr val="166534"/>
+                  <a:srgbClr val="A5335F"/>
                 </a:solidFill>
                 <a:latin typeface="Verdana"/>
               </a:rPr>
@@ -11648,7 +11648,7 @@
             </a:avLst>
           </a:prstGeom>
           <a:solidFill>
-            <a:srgbClr val="E3F1E7"/>
+            <a:srgbClr val="FCE9F0"/>
           </a:solidFill>
           <a:ln>
             <a:noFill/>
@@ -11705,7 +11705,7 @@
             <a:r>
               <a:rPr sz="1500" b="1" i="0">
                 <a:solidFill>
-                  <a:srgbClr val="166534"/>
+                  <a:srgbClr val="A5335F"/>
                 </a:solidFill>
                 <a:latin typeface="Verdana"/>
               </a:rPr>
@@ -11816,7 +11816,7 @@
             </a:avLst>
           </a:prstGeom>
           <a:solidFill>
-            <a:srgbClr val="E3F1E7"/>
+            <a:srgbClr val="FCE9F0"/>
           </a:solidFill>
           <a:ln>
             <a:noFill/>
@@ -11873,7 +11873,7 @@
             <a:r>
               <a:rPr sz="1500" b="1" i="0">
                 <a:solidFill>
-                  <a:srgbClr val="166534"/>
+                  <a:srgbClr val="A5335F"/>
                 </a:solidFill>
                 <a:latin typeface="Verdana"/>
               </a:rPr>
@@ -11984,7 +11984,7 @@
             </a:avLst>
           </a:prstGeom>
           <a:solidFill>
-            <a:srgbClr val="E3F1E7"/>
+            <a:srgbClr val="FCE9F0"/>
           </a:solidFill>
           <a:ln>
             <a:noFill/>
@@ -12041,7 +12041,7 @@
             <a:r>
               <a:rPr sz="1500" b="1" i="0">
                 <a:solidFill>
-                  <a:srgbClr val="166534"/>
+                  <a:srgbClr val="A5335F"/>
                 </a:solidFill>
                 <a:latin typeface="Verdana"/>
               </a:rPr>
@@ -12152,7 +12152,7 @@
             </a:avLst>
           </a:prstGeom>
           <a:solidFill>
-            <a:srgbClr val="E3F1E7"/>
+            <a:srgbClr val="FCE9F0"/>
           </a:solidFill>
           <a:ln>
             <a:noFill/>
@@ -12209,7 +12209,7 @@
             <a:r>
               <a:rPr sz="1500" b="1" i="0">
                 <a:solidFill>
-                  <a:srgbClr val="166534"/>
+                  <a:srgbClr val="A5335F"/>
                 </a:solidFill>
                 <a:latin typeface="Verdana"/>
               </a:rPr>
@@ -12425,7 +12425,7 @@
             <a:r>
               <a:rPr sz="1300" b="1" i="0" spc="156">
                 <a:solidFill>
-                  <a:srgbClr val="166534"/>
+                  <a:srgbClr val="A5335F"/>
                 </a:solidFill>
                 <a:latin typeface="Verdana"/>
               </a:rPr>
@@ -12604,7 +12604,7 @@
             <a:avLst/>
           </a:prstGeom>
           <a:solidFill>
-            <a:srgbClr val="166534"/>
+            <a:srgbClr val="A5335F"/>
           </a:solidFill>
           <a:ln>
             <a:noFill/>
@@ -12731,7 +12731,7 @@
             <a:avLst/>
           </a:prstGeom>
           <a:solidFill>
-            <a:srgbClr val="166534"/>
+            <a:srgbClr val="A5335F"/>
           </a:solidFill>
           <a:ln>
             <a:noFill/>
@@ -12858,7 +12858,7 @@
             <a:avLst/>
           </a:prstGeom>
           <a:solidFill>
-            <a:srgbClr val="166534"/>
+            <a:srgbClr val="A5335F"/>
           </a:solidFill>
           <a:ln>
             <a:noFill/>
@@ -12985,7 +12985,7 @@
             <a:avLst/>
           </a:prstGeom>
           <a:solidFill>
-            <a:srgbClr val="166534"/>
+            <a:srgbClr val="A5335F"/>
           </a:solidFill>
           <a:ln>
             <a:noFill/>
@@ -13219,7 +13219,7 @@
             <a:r>
               <a:rPr sz="1300" b="1" i="0" spc="156">
                 <a:solidFill>
-                  <a:srgbClr val="166534"/>
+                  <a:srgbClr val="A5335F"/>
                 </a:solidFill>
                 <a:latin typeface="Verdana"/>
               </a:rPr>
@@ -13421,7 +13421,7 @@
             <a:r>
               <a:rPr sz="1800" b="1" i="0">
                 <a:solidFill>
-                  <a:srgbClr val="166534"/>
+                  <a:srgbClr val="A5335F"/>
                 </a:solidFill>
                 <a:latin typeface="Verdana"/>
               </a:rPr>
@@ -13541,7 +13541,7 @@
             <a:r>
               <a:rPr sz="1800" b="1" i="0">
                 <a:solidFill>
-                  <a:srgbClr val="166534"/>
+                  <a:srgbClr val="A5335F"/>
                 </a:solidFill>
                 <a:latin typeface="Verdana"/>
               </a:rPr>
@@ -13661,7 +13661,7 @@
             <a:r>
               <a:rPr sz="1800" b="1" i="0">
                 <a:solidFill>
-                  <a:srgbClr val="166534"/>
+                  <a:srgbClr val="A5335F"/>
                 </a:solidFill>
                 <a:latin typeface="Verdana"/>
               </a:rPr>
@@ -13781,7 +13781,7 @@
             <a:r>
               <a:rPr sz="1800" b="1" i="0">
                 <a:solidFill>
-                  <a:srgbClr val="166534"/>
+                  <a:srgbClr val="A5335F"/>
                 </a:solidFill>
                 <a:latin typeface="Verdana"/>
               </a:rPr>
@@ -13901,7 +13901,7 @@
             <a:r>
               <a:rPr sz="1800" b="1" i="0">
                 <a:solidFill>
-                  <a:srgbClr val="166534"/>
+                  <a:srgbClr val="A5335F"/>
                 </a:solidFill>
                 <a:latin typeface="Verdana"/>
               </a:rPr>
@@ -14021,7 +14021,7 @@
             <a:r>
               <a:rPr sz="1800" b="1" i="0">
                 <a:solidFill>
-                  <a:srgbClr val="166534"/>
+                  <a:srgbClr val="A5335F"/>
                 </a:solidFill>
                 <a:latin typeface="Verdana"/>
               </a:rPr>
@@ -14237,7 +14237,7 @@
             <a:r>
               <a:rPr sz="1300" b="1" i="0" spc="156">
                 <a:solidFill>
-                  <a:srgbClr val="166534"/>
+                  <a:srgbClr val="A5335F"/>
                 </a:solidFill>
                 <a:latin typeface="Verdana"/>
               </a:rPr>
@@ -14263,7 +14263,7 @@
             </a:avLst>
           </a:prstGeom>
           <a:solidFill>
-            <a:srgbClr val="E3F1E7"/>
+            <a:srgbClr val="FCE9F0"/>
           </a:solidFill>
           <a:ln w="12700">
             <a:solidFill>
@@ -14584,7 +14584,7 @@
             <a:r>
               <a:rPr sz="1300" b="1" i="0" spc="156">
                 <a:solidFill>
-                  <a:srgbClr val="166534"/>
+                  <a:srgbClr val="A5335F"/>
                 </a:solidFill>
                 <a:latin typeface="Verdana"/>
               </a:rPr>
@@ -14708,7 +14708,7 @@
             <a:r>
               <a:rPr sz="2400" b="1" i="0">
                 <a:solidFill>
-                  <a:srgbClr val="166534"/>
+                  <a:srgbClr val="A5335F"/>
                 </a:solidFill>
                 <a:latin typeface="Verdana"/>
               </a:rPr>
@@ -14832,7 +14832,7 @@
             <a:r>
               <a:rPr sz="2400" b="1" i="0">
                 <a:solidFill>
-                  <a:srgbClr val="166534"/>
+                  <a:srgbClr val="A5335F"/>
                 </a:solidFill>
                 <a:latin typeface="Verdana"/>
               </a:rPr>
@@ -14956,7 +14956,7 @@
             <a:r>
               <a:rPr sz="2400" b="1" i="0">
                 <a:solidFill>
-                  <a:srgbClr val="166534"/>
+                  <a:srgbClr val="A5335F"/>
                 </a:solidFill>
                 <a:latin typeface="Verdana"/>
               </a:rPr>
@@ -15080,7 +15080,7 @@
             <a:r>
               <a:rPr sz="2400" b="1" i="0">
                 <a:solidFill>
-                  <a:srgbClr val="166534"/>
+                  <a:srgbClr val="A5335F"/>
                 </a:solidFill>
                 <a:latin typeface="Verdana"/>
               </a:rPr>
@@ -15296,7 +15296,7 @@
             <a:r>
               <a:rPr sz="1300" b="1" i="0" spc="156">
                 <a:solidFill>
-                  <a:srgbClr val="166534"/>
+                  <a:srgbClr val="A5335F"/>
                 </a:solidFill>
                 <a:latin typeface="Verdana"/>
               </a:rPr>
@@ -15446,7 +15446,7 @@
             </a:avLst>
           </a:prstGeom>
           <a:solidFill>
-            <a:srgbClr val="E3F1E7"/>
+            <a:srgbClr val="FCE9F0"/>
           </a:solidFill>
           <a:ln>
             <a:noFill/>
@@ -15503,7 +15503,7 @@
             <a:r>
               <a:rPr sz="1500" b="1" i="0">
                 <a:solidFill>
-                  <a:srgbClr val="166534"/>
+                  <a:srgbClr val="A5335F"/>
                 </a:solidFill>
                 <a:latin typeface="Verdana"/>
               </a:rPr>
@@ -15614,7 +15614,7 @@
             </a:avLst>
           </a:prstGeom>
           <a:solidFill>
-            <a:srgbClr val="E3F1E7"/>
+            <a:srgbClr val="FCE9F0"/>
           </a:solidFill>
           <a:ln>
             <a:noFill/>
@@ -15671,7 +15671,7 @@
             <a:r>
               <a:rPr sz="1500" b="1" i="0">
                 <a:solidFill>
-                  <a:srgbClr val="166534"/>
+                  <a:srgbClr val="A5335F"/>
                 </a:solidFill>
                 <a:latin typeface="Verdana"/>
               </a:rPr>
@@ -15782,7 +15782,7 @@
             </a:avLst>
           </a:prstGeom>
           <a:solidFill>
-            <a:srgbClr val="E3F1E7"/>
+            <a:srgbClr val="FCE9F0"/>
           </a:solidFill>
           <a:ln>
             <a:noFill/>
@@ -15839,7 +15839,7 @@
             <a:r>
               <a:rPr sz="1500" b="1" i="0">
                 <a:solidFill>
-                  <a:srgbClr val="166534"/>
+                  <a:srgbClr val="A5335F"/>
                 </a:solidFill>
                 <a:latin typeface="Verdana"/>
               </a:rPr>
@@ -15950,7 +15950,7 @@
             </a:avLst>
           </a:prstGeom>
           <a:solidFill>
-            <a:srgbClr val="E3F1E7"/>
+            <a:srgbClr val="FCE9F0"/>
           </a:solidFill>
           <a:ln>
             <a:noFill/>
@@ -16007,7 +16007,7 @@
             <a:r>
               <a:rPr sz="1500" b="1" i="0">
                 <a:solidFill>
-                  <a:srgbClr val="166534"/>
+                  <a:srgbClr val="A5335F"/>
                 </a:solidFill>
                 <a:latin typeface="Verdana"/>
               </a:rPr>
@@ -16118,7 +16118,7 @@
             </a:avLst>
           </a:prstGeom>
           <a:solidFill>
-            <a:srgbClr val="E3F1E7"/>
+            <a:srgbClr val="FCE9F0"/>
           </a:solidFill>
           <a:ln>
             <a:noFill/>
@@ -16175,7 +16175,7 @@
             <a:r>
               <a:rPr sz="1500" b="1" i="0">
                 <a:solidFill>
-                  <a:srgbClr val="166534"/>
+                  <a:srgbClr val="A5335F"/>
                 </a:solidFill>
                 <a:latin typeface="Verdana"/>
               </a:rPr>
@@ -16391,7 +16391,7 @@
             <a:r>
               <a:rPr sz="1300" b="1" i="0" spc="156">
                 <a:solidFill>
-                  <a:srgbClr val="166534"/>
+                  <a:srgbClr val="A5335F"/>
                 </a:solidFill>
                 <a:latin typeface="Verdana"/>
               </a:rPr>
@@ -16541,7 +16541,7 @@
             </a:avLst>
           </a:prstGeom>
           <a:solidFill>
-            <a:srgbClr val="E3F1E7"/>
+            <a:srgbClr val="FCE9F0"/>
           </a:solidFill>
           <a:ln>
             <a:noFill/>
@@ -16598,7 +16598,7 @@
             <a:r>
               <a:rPr sz="1500" b="1" i="0">
                 <a:solidFill>
-                  <a:srgbClr val="166534"/>
+                  <a:srgbClr val="A5335F"/>
                 </a:solidFill>
                 <a:latin typeface="Verdana"/>
               </a:rPr>
@@ -16718,7 +16718,7 @@
             </a:avLst>
           </a:prstGeom>
           <a:solidFill>
-            <a:srgbClr val="E3F1E7"/>
+            <a:srgbClr val="FCE9F0"/>
           </a:solidFill>
           <a:ln>
             <a:noFill/>
@@ -16775,7 +16775,7 @@
             <a:r>
               <a:rPr sz="1500" b="1" i="0">
                 <a:solidFill>
-                  <a:srgbClr val="166534"/>
+                  <a:srgbClr val="A5335F"/>
                 </a:solidFill>
                 <a:latin typeface="Verdana"/>
               </a:rPr>
@@ -16895,7 +16895,7 @@
             </a:avLst>
           </a:prstGeom>
           <a:solidFill>
-            <a:srgbClr val="E3F1E7"/>
+            <a:srgbClr val="FCE9F0"/>
           </a:solidFill>
           <a:ln>
             <a:noFill/>
@@ -16952,7 +16952,7 @@
             <a:r>
               <a:rPr sz="1500" b="1" i="0">
                 <a:solidFill>
-                  <a:srgbClr val="166534"/>
+                  <a:srgbClr val="A5335F"/>
                 </a:solidFill>
                 <a:latin typeface="Verdana"/>
               </a:rPr>
@@ -17072,7 +17072,7 @@
             </a:avLst>
           </a:prstGeom>
           <a:solidFill>
-            <a:srgbClr val="E3F1E7"/>
+            <a:srgbClr val="FCE9F0"/>
           </a:solidFill>
           <a:ln>
             <a:noFill/>
@@ -17129,7 +17129,7 @@
             <a:r>
               <a:rPr sz="1500" b="1" i="0">
                 <a:solidFill>
-                  <a:srgbClr val="166534"/>
+                  <a:srgbClr val="A5335F"/>
                 </a:solidFill>
                 <a:latin typeface="Verdana"/>
               </a:rPr>
@@ -17249,7 +17249,7 @@
             </a:avLst>
           </a:prstGeom>
           <a:solidFill>
-            <a:srgbClr val="E3F1E7"/>
+            <a:srgbClr val="FCE9F0"/>
           </a:solidFill>
           <a:ln>
             <a:noFill/>
@@ -17306,7 +17306,7 @@
             <a:r>
               <a:rPr sz="1500" b="1" i="0">
                 <a:solidFill>
-                  <a:srgbClr val="166534"/>
+                  <a:srgbClr val="A5335F"/>
                 </a:solidFill>
                 <a:latin typeface="Verdana"/>
               </a:rPr>
@@ -17531,7 +17531,7 @@
             <a:r>
               <a:rPr sz="1300" b="1" i="0" spc="156">
                 <a:solidFill>
-                  <a:srgbClr val="166534"/>
+                  <a:srgbClr val="A5335F"/>
                 </a:solidFill>
                 <a:latin typeface="Verdana"/>
               </a:rPr>
@@ -17681,7 +17681,7 @@
             </a:avLst>
           </a:prstGeom>
           <a:solidFill>
-            <a:srgbClr val="E3F1E7"/>
+            <a:srgbClr val="FCE9F0"/>
           </a:solidFill>
           <a:ln>
             <a:noFill/>
@@ -17738,7 +17738,7 @@
             <a:r>
               <a:rPr sz="1500" b="1" i="0">
                 <a:solidFill>
-                  <a:srgbClr val="166534"/>
+                  <a:srgbClr val="A5335F"/>
                 </a:solidFill>
                 <a:latin typeface="Verdana"/>
               </a:rPr>
@@ -17849,7 +17849,7 @@
             </a:avLst>
           </a:prstGeom>
           <a:solidFill>
-            <a:srgbClr val="E3F1E7"/>
+            <a:srgbClr val="FCE9F0"/>
           </a:solidFill>
           <a:ln>
             <a:noFill/>
@@ -17906,7 +17906,7 @@
             <a:r>
               <a:rPr sz="1500" b="1" i="0">
                 <a:solidFill>
-                  <a:srgbClr val="166534"/>
+                  <a:srgbClr val="A5335F"/>
                 </a:solidFill>
                 <a:latin typeface="Verdana"/>
               </a:rPr>
@@ -18017,7 +18017,7 @@
             </a:avLst>
           </a:prstGeom>
           <a:solidFill>
-            <a:srgbClr val="E3F1E7"/>
+            <a:srgbClr val="FCE9F0"/>
           </a:solidFill>
           <a:ln>
             <a:noFill/>
@@ -18074,7 +18074,7 @@
             <a:r>
               <a:rPr sz="1500" b="1" i="0">
                 <a:solidFill>
-                  <a:srgbClr val="166534"/>
+                  <a:srgbClr val="A5335F"/>
                 </a:solidFill>
                 <a:latin typeface="Verdana"/>
               </a:rPr>
@@ -18185,7 +18185,7 @@
             </a:avLst>
           </a:prstGeom>
           <a:solidFill>
-            <a:srgbClr val="E3F1E7"/>
+            <a:srgbClr val="FCE9F0"/>
           </a:solidFill>
           <a:ln>
             <a:noFill/>
@@ -18242,7 +18242,7 @@
             <a:r>
               <a:rPr sz="1500" b="1" i="0">
                 <a:solidFill>
-                  <a:srgbClr val="166534"/>
+                  <a:srgbClr val="A5335F"/>
                 </a:solidFill>
                 <a:latin typeface="Verdana"/>
               </a:rPr>
@@ -18353,7 +18353,7 @@
             </a:avLst>
           </a:prstGeom>
           <a:solidFill>
-            <a:srgbClr val="E3F1E7"/>
+            <a:srgbClr val="FCE9F0"/>
           </a:solidFill>
           <a:ln>
             <a:noFill/>
@@ -18410,7 +18410,7 @@
             <a:r>
               <a:rPr sz="1500" b="1" i="0">
                 <a:solidFill>
-                  <a:srgbClr val="166534"/>
+                  <a:srgbClr val="A5335F"/>
                 </a:solidFill>
                 <a:latin typeface="Verdana"/>
               </a:rPr>
